--- a/Aula04_Problemas_e_Algoritmos/Aula04_Teoria.pptx
+++ b/Aula04_Problemas_e_Algoritmos/Aula04_Teoria.pptx
@@ -2320,6 +2320,10 @@
           </a:solidFill>
           <a:ln/>
         </p:spPr>
+        <p:txBody>
+          <a:bodyPr/>
+          <a:p/>
+        </p:txBody>
       </p:sp>
       <p:sp>
         <p:nvSpPr>
@@ -2342,6 +2346,10 @@
           </a:solidFill>
           <a:ln/>
         </p:spPr>
+        <p:txBody>
+          <a:bodyPr/>
+          <a:p/>
+        </p:txBody>
       </p:sp>
       <p:sp>
         <p:nvSpPr>
@@ -2362,6 +2370,10 @@
           </a:solidFill>
           <a:ln/>
         </p:spPr>
+        <p:txBody>
+          <a:bodyPr/>
+          <a:p/>
+        </p:txBody>
       </p:sp>
       <p:pic>
         <p:nvPicPr>
@@ -2600,6 +2612,10 @@
           </a:solidFill>
           <a:ln/>
         </p:spPr>
+        <p:txBody>
+          <a:bodyPr/>
+          <a:p/>
+        </p:txBody>
       </p:sp>
       <p:sp>
         <p:nvSpPr>
@@ -2912,6 +2928,10 @@
             </a:outerShdw>
           </a:effectLst>
         </p:spPr>
+        <p:txBody>
+          <a:bodyPr/>
+          <a:p/>
+        </p:txBody>
       </p:sp>
       <p:sp>
         <p:nvSpPr>
@@ -3272,6 +3292,10 @@
             </a:outerShdw>
           </a:effectLst>
         </p:spPr>
+        <p:txBody>
+          <a:bodyPr/>
+          <a:p/>
+        </p:txBody>
       </p:sp>
       <p:sp>
         <p:nvSpPr>
@@ -3370,7 +3394,7 @@
                 <a:ea typeface="Calibri" pitchFamily="34" charset="-122"/>
                 <a:cs typeface="Calibri" pitchFamily="34" charset="-120"/>
               </a:rPr>
-              <a:t>Queiroz: a análise qualitativa observa invariantes e relações mobilizadas na ação.</a:t>
+              <a:t>A análise qualitativa observa invariantes e relações mobilizadas na ação.</a:t>
             </a:r>
             <a:endParaRPr lang="en-US" sz="1100" dirty="0"/>
           </a:p>
@@ -3391,7 +3415,7 @@
                 <a:ea typeface="Calibri" pitchFamily="34" charset="-122"/>
                 <a:cs typeface="Calibri" pitchFamily="34" charset="-120"/>
               </a:rPr>
-              <a:t>Relato: solicitar explicação do raciocínio desenvolvido.</a:t>
+              <a:t>Solicitar explicação do raciocínio desenvolvido.</a:t>
             </a:r>
             <a:endParaRPr lang="en-US" sz="1100" dirty="0"/>
           </a:p>
@@ -3412,7 +3436,7 @@
                 <a:ea typeface="Calibri" pitchFamily="34" charset="-122"/>
                 <a:cs typeface="Calibri" pitchFamily="34" charset="-120"/>
               </a:rPr>
-              <a:t>Wessels: transnumeração torna dados interpretáveis em nova forma.</a:t>
+              <a:t>Transnumeração torna dados interpretáveis em nova forma.</a:t>
             </a:r>
             <a:endParaRPr lang="en-US" sz="1100" dirty="0"/>
           </a:p>
@@ -3446,6 +3470,10 @@
             </a:outerShdw>
           </a:effectLst>
         </p:spPr>
+        <p:txBody>
+          <a:bodyPr/>
+          <a:p/>
+        </p:txBody>
       </p:sp>
       <p:sp>
         <p:nvSpPr>
@@ -3680,6 +3708,10 @@
           </a:solidFill>
           <a:ln/>
         </p:spPr>
+        <p:txBody>
+          <a:bodyPr/>
+          <a:p/>
+        </p:txBody>
       </p:sp>
       <p:sp>
         <p:nvSpPr>
@@ -3992,6 +4024,10 @@
             </a:outerShdw>
           </a:effectLst>
         </p:spPr>
+        <p:txBody>
+          <a:bodyPr/>
+          <a:p/>
+        </p:txBody>
       </p:sp>
       <p:sp>
         <p:nvSpPr>
@@ -4318,6 +4354,10 @@
             </a:outerShdw>
           </a:effectLst>
         </p:spPr>
+        <p:txBody>
+          <a:bodyPr/>
+          <a:p/>
+        </p:txBody>
       </p:sp>
       <p:sp>
         <p:nvSpPr>
@@ -4416,7 +4456,7 @@
                 <a:ea typeface="Calibri" pitchFamily="34" charset="-122"/>
                 <a:cs typeface="Calibri" pitchFamily="34" charset="-120"/>
               </a:rPr>
-              <a:t>Wessels: organizar dados é componente crítico da representação.</a:t>
+              <a:t>Organizar dados é componente crítico da representação.</a:t>
             </a:r>
             <a:endParaRPr lang="en-US" sz="1100" dirty="0"/>
           </a:p>
@@ -4437,7 +4477,7 @@
                 <a:ea typeface="Calibri" pitchFamily="34" charset="-122"/>
                 <a:cs typeface="Calibri" pitchFamily="34" charset="-120"/>
               </a:rPr>
-              <a:t>Queiroz: a forma de representação influencia erros, antecipações e reorganizações.</a:t>
+              <a:t>A forma de representação influencia erros, antecipações e reorganizações.</a:t>
             </a:r>
             <a:endParaRPr lang="en-US" sz="1100" dirty="0"/>
           </a:p>
@@ -4458,7 +4498,7 @@
                 <a:ea typeface="Calibri" pitchFamily="34" charset="-122"/>
                 <a:cs typeface="Calibri" pitchFamily="34" charset="-120"/>
               </a:rPr>
-              <a:t>Relato: incluir revisão, depuração e reconstrução.</a:t>
+              <a:t>Incluir revisão, depuração e reconstrução.</a:t>
             </a:r>
             <a:endParaRPr lang="en-US" sz="1100" dirty="0"/>
           </a:p>
@@ -4492,6 +4532,10 @@
             </a:outerShdw>
           </a:effectLst>
         </p:spPr>
+        <p:txBody>
+          <a:bodyPr/>
+          <a:p/>
+        </p:txBody>
       </p:sp>
       <p:sp>
         <p:nvSpPr>
@@ -4726,6 +4770,10 @@
           </a:solidFill>
           <a:ln/>
         </p:spPr>
+        <p:txBody>
+          <a:bodyPr/>
+          <a:p/>
+        </p:txBody>
       </p:sp>
       <p:sp>
         <p:nvSpPr>
@@ -5038,6 +5086,10 @@
             </a:outerShdw>
           </a:effectLst>
         </p:spPr>
+        <p:txBody>
+          <a:bodyPr/>
+          <a:p/>
+        </p:txBody>
       </p:sp>
       <p:sp>
         <p:nvSpPr>
@@ -5441,6 +5493,10 @@
             </a:outerShdw>
           </a:effectLst>
         </p:spPr>
+        <p:txBody>
+          <a:bodyPr/>
+          <a:p/>
+        </p:txBody>
       </p:sp>
       <p:sp>
         <p:nvSpPr>
@@ -5539,7 +5595,7 @@
                 <a:ea typeface="Calibri" pitchFamily="34" charset="-122"/>
                 <a:cs typeface="Calibri" pitchFamily="34" charset="-120"/>
               </a:rPr>
-              <a:t>Wessels: listas, tabelas e gráficos comunicam histórias diferentes dos dados.</a:t>
+              <a:t>Listas, tabelas e gráficos comunicam histórias diferentes dos dados.</a:t>
             </a:r>
             <a:endParaRPr lang="en-US" sz="1100" dirty="0"/>
           </a:p>
@@ -5560,7 +5616,7 @@
                 <a:ea typeface="Calibri" pitchFamily="34" charset="-122"/>
                 <a:cs typeface="Calibri" pitchFamily="34" charset="-120"/>
               </a:rPr>
-              <a:t>Queiroz: a interação consciente com a forma favorece reflexão conceitual.</a:t>
+              <a:t>A interação consciente com a forma favorece reflexão conceitual.</a:t>
             </a:r>
             <a:endParaRPr lang="en-US" sz="1100" dirty="0"/>
           </a:p>
@@ -5581,7 +5637,7 @@
                 <a:ea typeface="Calibri" pitchFamily="34" charset="-122"/>
                 <a:cs typeface="Calibri" pitchFamily="34" charset="-120"/>
               </a:rPr>
-              <a:t>Relato: permitir manipulação de parâmetros e comparação de estados.</a:t>
+              <a:t>Permitir manipulação de parâmetros e comparação de estados.</a:t>
             </a:r>
             <a:endParaRPr lang="en-US" sz="1100" dirty="0"/>
           </a:p>
@@ -5615,6 +5671,10 @@
             </a:outerShdw>
           </a:effectLst>
         </p:spPr>
+        <p:txBody>
+          <a:bodyPr/>
+          <a:p/>
+        </p:txBody>
       </p:sp>
       <p:sp>
         <p:nvSpPr>
@@ -5849,6 +5909,10 @@
           </a:solidFill>
           <a:ln/>
         </p:spPr>
+        <p:txBody>
+          <a:bodyPr/>
+          <a:p/>
+        </p:txBody>
       </p:sp>
       <p:sp>
         <p:nvSpPr>
@@ -6161,6 +6225,10 @@
             </a:outerShdw>
           </a:effectLst>
         </p:spPr>
+        <p:txBody>
+          <a:bodyPr/>
+          <a:p/>
+        </p:txBody>
       </p:sp>
       <p:sp>
         <p:nvSpPr>
@@ -6544,6 +6612,10 @@
             </a:outerShdw>
           </a:effectLst>
         </p:spPr>
+        <p:txBody>
+          <a:bodyPr/>
+          <a:p/>
+        </p:txBody>
       </p:sp>
       <p:sp>
         <p:nvSpPr>
@@ -6642,7 +6714,7 @@
                 <a:ea typeface="Calibri" pitchFamily="34" charset="-122"/>
                 <a:cs typeface="Calibri" pitchFamily="34" charset="-120"/>
               </a:rPr>
-              <a:t>Relato: avaliar o percurso de pensamento, não apenas o código final.</a:t>
+              <a:t>Avaliar o percurso de pensamento, não apenas o código final.</a:t>
             </a:r>
             <a:endParaRPr lang="en-US" sz="1100" dirty="0"/>
           </a:p>
@@ -6663,7 +6735,7 @@
                 <a:ea typeface="Calibri" pitchFamily="34" charset="-122"/>
                 <a:cs typeface="Calibri" pitchFamily="34" charset="-120"/>
               </a:rPr>
-              <a:t>Queiroz: o resultado final não esgota a aprendizagem do conceito.</a:t>
+              <a:t>O resultado final não esgota a aprendizagem do conceito.</a:t>
             </a:r>
             <a:endParaRPr lang="en-US" sz="1100" dirty="0"/>
           </a:p>
@@ -6684,7 +6756,7 @@
                 <a:ea typeface="Calibri" pitchFamily="34" charset="-122"/>
                 <a:cs typeface="Calibri" pitchFamily="34" charset="-120"/>
               </a:rPr>
-              <a:t>Wessels: múltiplas representações indicam modelagem mais bem-sucedida.</a:t>
+              <a:t>Múltiplas representações indicam modelagem mais bem-sucedida.</a:t>
             </a:r>
             <a:endParaRPr lang="en-US" sz="1100" dirty="0"/>
           </a:p>
@@ -6718,6 +6790,10 @@
             </a:outerShdw>
           </a:effectLst>
         </p:spPr>
+        <p:txBody>
+          <a:bodyPr/>
+          <a:p/>
+        </p:txBody>
       </p:sp>
       <p:sp>
         <p:nvSpPr>
@@ -6952,6 +7028,10 @@
           </a:solidFill>
           <a:ln/>
         </p:spPr>
+        <p:txBody>
+          <a:bodyPr/>
+          <a:p/>
+        </p:txBody>
       </p:sp>
       <p:sp>
         <p:nvSpPr>
@@ -7264,6 +7344,10 @@
             </a:outerShdw>
           </a:effectLst>
         </p:spPr>
+        <p:txBody>
+          <a:bodyPr/>
+          <a:p/>
+        </p:txBody>
       </p:sp>
       <p:sp>
         <p:nvSpPr>
@@ -7746,6 +7830,10 @@
             </a:outerShdw>
           </a:effectLst>
         </p:spPr>
+        <p:txBody>
+          <a:bodyPr/>
+          <a:p/>
+        </p:txBody>
       </p:sp>
       <p:sp>
         <p:nvSpPr>
@@ -7844,7 +7932,7 @@
                 <a:ea typeface="Calibri" pitchFamily="34" charset="-122"/>
                 <a:cs typeface="Calibri" pitchFamily="34" charset="-120"/>
               </a:rPr>
-              <a:t>Queiroz: a forma de representação influencia erros, antecipações e reorganizações.</a:t>
+              <a:t>A forma de representação influencia erros, antecipações e reorganizações.</a:t>
             </a:r>
             <a:endParaRPr lang="en-US" sz="1100" dirty="0"/>
           </a:p>
@@ -7865,7 +7953,7 @@
                 <a:ea typeface="Calibri" pitchFamily="34" charset="-122"/>
                 <a:cs typeface="Calibri" pitchFamily="34" charset="-120"/>
               </a:rPr>
-              <a:t>Relato: incluir revisão, depuração e reconstrução.</a:t>
+              <a:t>Incluir revisão, depuração e reconstrução.</a:t>
             </a:r>
             <a:endParaRPr lang="en-US" sz="1100" dirty="0"/>
           </a:p>
@@ -7886,7 +7974,7 @@
                 <a:ea typeface="Calibri" pitchFamily="34" charset="-122"/>
                 <a:cs typeface="Calibri" pitchFamily="34" charset="-120"/>
               </a:rPr>
-              <a:t>Wessels: respostas idiossincráticas também revelam modos de pensar.</a:t>
+              <a:t>Respostas idiossincráticas também revelam modos de pensar.</a:t>
             </a:r>
             <a:endParaRPr lang="en-US" sz="1100" dirty="0"/>
           </a:p>
@@ -7920,6 +8008,10 @@
             </a:outerShdw>
           </a:effectLst>
         </p:spPr>
+        <p:txBody>
+          <a:bodyPr/>
+          <a:p/>
+        </p:txBody>
       </p:sp>
       <p:sp>
         <p:nvSpPr>
@@ -8154,6 +8246,10 @@
           </a:solidFill>
           <a:ln/>
         </p:spPr>
+        <p:txBody>
+          <a:bodyPr/>
+          <a:p/>
+        </p:txBody>
       </p:sp>
       <p:sp>
         <p:nvSpPr>
@@ -8466,6 +8562,10 @@
             </a:outerShdw>
           </a:effectLst>
         </p:spPr>
+        <p:txBody>
+          <a:bodyPr/>
+          <a:p/>
+        </p:txBody>
       </p:sp>
       <p:sp>
         <p:nvSpPr>
@@ -9186,6 +9286,10 @@
             </a:outerShdw>
           </a:effectLst>
         </p:spPr>
+        <p:txBody>
+          <a:bodyPr/>
+          <a:p/>
+        </p:txBody>
       </p:sp>
       <p:sp>
         <p:nvSpPr>
@@ -9284,7 +9388,7 @@
                 <a:ea typeface="Calibri" pitchFamily="34" charset="-122"/>
                 <a:cs typeface="Calibri" pitchFamily="34" charset="-120"/>
               </a:rPr>
-              <a:t>Relato: permitir manipulação de parâmetros e comparação de estados.</a:t>
+              <a:t>Permitir manipulação de parâmetros e comparação de estados.</a:t>
             </a:r>
             <a:endParaRPr lang="en-US" sz="1100" dirty="0"/>
           </a:p>
@@ -9305,7 +9409,7 @@
                 <a:ea typeface="Calibri" pitchFamily="34" charset="-122"/>
                 <a:cs typeface="Calibri" pitchFamily="34" charset="-120"/>
               </a:rPr>
-              <a:t>Queiroz: o percurso da tarefa revela mudanças no discurso e na ação.</a:t>
+              <a:t>O percurso da tarefa revela mudanças no discurso e na ação.</a:t>
             </a:r>
             <a:endParaRPr lang="en-US" sz="1100" dirty="0"/>
           </a:p>
@@ -9326,7 +9430,7 @@
                 <a:ea typeface="Calibri" pitchFamily="34" charset="-122"/>
                 <a:cs typeface="Calibri" pitchFamily="34" charset="-120"/>
               </a:rPr>
-              <a:t>Wessels: atividades planejadas desenvolvem representação e pensamento de ordem superior.</a:t>
+              <a:t>Atividades planejadas desenvolvem representação e pensamento de ordem superior.</a:t>
             </a:r>
             <a:endParaRPr lang="en-US" sz="1100" dirty="0"/>
           </a:p>
@@ -9360,6 +9464,10 @@
             </a:outerShdw>
           </a:effectLst>
         </p:spPr>
+        <p:txBody>
+          <a:bodyPr/>
+          <a:p/>
+        </p:txBody>
       </p:sp>
       <p:sp>
         <p:nvSpPr>
@@ -9594,6 +9702,10 @@
           </a:solidFill>
           <a:ln/>
         </p:spPr>
+        <p:txBody>
+          <a:bodyPr/>
+          <a:p/>
+        </p:txBody>
       </p:sp>
       <p:sp>
         <p:nvSpPr>
@@ -9906,6 +10018,10 @@
             </a:outerShdw>
           </a:effectLst>
         </p:spPr>
+        <p:txBody>
+          <a:bodyPr/>
+          <a:p/>
+        </p:txBody>
       </p:sp>
       <p:sp>
         <p:nvSpPr>
@@ -10368,6 +10484,10 @@
             </a:outerShdw>
           </a:effectLst>
         </p:spPr>
+        <p:txBody>
+          <a:bodyPr/>
+          <a:p/>
+        </p:txBody>
       </p:sp>
       <p:sp>
         <p:nvSpPr>
@@ -10466,7 +10586,7 @@
                 <a:ea typeface="Calibri" pitchFamily="34" charset="-122"/>
                 <a:cs typeface="Calibri" pitchFamily="34" charset="-120"/>
               </a:rPr>
-              <a:t>Relato: avaliar o percurso de pensamento, não apenas o código final.</a:t>
+              <a:t>Avaliar o percurso de pensamento, não apenas o código final.</a:t>
             </a:r>
             <a:endParaRPr lang="en-US" sz="1100" dirty="0"/>
           </a:p>
@@ -10487,7 +10607,7 @@
                 <a:ea typeface="Calibri" pitchFamily="34" charset="-122"/>
                 <a:cs typeface="Calibri" pitchFamily="34" charset="-120"/>
               </a:rPr>
-              <a:t>Queiroz: o percurso da tarefa revela mudanças no discurso e na ação.</a:t>
+              <a:t>O percurso da tarefa revela mudanças no discurso e na ação.</a:t>
             </a:r>
             <a:endParaRPr lang="en-US" sz="1100" dirty="0"/>
           </a:p>
@@ -10508,7 +10628,7 @@
                 <a:ea typeface="Calibri" pitchFamily="34" charset="-122"/>
                 <a:cs typeface="Calibri" pitchFamily="34" charset="-120"/>
               </a:rPr>
-              <a:t>Wessels: níveis SOLO ajudam a observar respostas de menor a maior integração.</a:t>
+              <a:t>Níveis SOLO ajudam a observar respostas de menor a maior integração.</a:t>
             </a:r>
             <a:endParaRPr lang="en-US" sz="1100" dirty="0"/>
           </a:p>
@@ -10542,6 +10662,10 @@
             </a:outerShdw>
           </a:effectLst>
         </p:spPr>
+        <p:txBody>
+          <a:bodyPr/>
+          <a:p/>
+        </p:txBody>
       </p:sp>
       <p:sp>
         <p:nvSpPr>
@@ -10778,6 +10902,10 @@
           </a:solidFill>
           <a:ln/>
         </p:spPr>
+        <p:txBody>
+          <a:bodyPr/>
+          <a:p/>
+        </p:txBody>
       </p:sp>
       <p:sp>
         <p:nvSpPr>
@@ -10800,6 +10928,10 @@
           </a:solidFill>
           <a:ln/>
         </p:spPr>
+        <p:txBody>
+          <a:bodyPr/>
+          <a:p/>
+        </p:txBody>
       </p:sp>
       <p:sp>
         <p:nvSpPr>
@@ -10901,6 +11033,10 @@
           </a:solidFill>
           <a:ln/>
         </p:spPr>
+        <p:txBody>
+          <a:bodyPr/>
+          <a:p/>
+        </p:txBody>
       </p:sp>
       <p:sp>
         <p:nvSpPr>
@@ -11002,6 +11138,10 @@
           </a:solidFill>
           <a:ln/>
         </p:spPr>
+        <p:txBody>
+          <a:bodyPr/>
+          <a:p/>
+        </p:txBody>
       </p:sp>
       <p:sp>
         <p:nvSpPr>
@@ -11105,6 +11245,10 @@
           </a:solidFill>
           <a:ln/>
         </p:spPr>
+        <p:txBody>
+          <a:bodyPr/>
+          <a:p/>
+        </p:txBody>
       </p:sp>
       <p:sp>
         <p:nvSpPr>
@@ -11125,6 +11269,10 @@
           </a:solidFill>
           <a:ln/>
         </p:spPr>
+        <p:txBody>
+          <a:bodyPr/>
+          <a:p/>
+        </p:txBody>
       </p:sp>
       <p:pic>
         <p:nvPicPr>
@@ -11396,6 +11544,10 @@
           </a:solidFill>
           <a:ln/>
         </p:spPr>
+        <p:txBody>
+          <a:bodyPr/>
+          <a:p/>
+        </p:txBody>
       </p:sp>
       <p:pic>
         <p:nvPicPr>
@@ -11484,6 +11636,10 @@
           </a:solidFill>
           <a:ln/>
         </p:spPr>
+        <p:txBody>
+          <a:bodyPr/>
+          <a:p/>
+        </p:txBody>
       </p:sp>
       <p:sp>
         <p:nvSpPr>
@@ -11557,6 +11713,10 @@
             </a:outerShdw>
           </a:effectLst>
         </p:spPr>
+        <p:txBody>
+          <a:bodyPr/>
+          <a:p/>
+        </p:txBody>
       </p:sp>
       <p:sp>
         <p:nvSpPr>
@@ -11896,6 +12056,10 @@
           </a:solidFill>
           <a:ln/>
         </p:spPr>
+        <p:txBody>
+          <a:bodyPr/>
+          <a:p/>
+        </p:txBody>
       </p:sp>
       <p:pic>
         <p:nvPicPr>
@@ -11996,6 +12160,10 @@
             </a:outerShdw>
           </a:effectLst>
         </p:spPr>
+        <p:txBody>
+          <a:bodyPr/>
+          <a:p/>
+        </p:txBody>
       </p:sp>
       <p:sp>
         <p:nvSpPr>
@@ -12133,6 +12301,10 @@
             </a:outerShdw>
           </a:effectLst>
         </p:spPr>
+        <p:txBody>
+          <a:bodyPr/>
+          <a:p/>
+        </p:txBody>
       </p:sp>
       <p:sp>
         <p:nvSpPr>
@@ -12447,6 +12619,10 @@
           </a:solidFill>
           <a:ln/>
         </p:spPr>
+        <p:txBody>
+          <a:bodyPr/>
+          <a:p/>
+        </p:txBody>
       </p:sp>
       <p:pic>
         <p:nvPicPr>
@@ -12547,6 +12723,10 @@
             </a:outerShdw>
           </a:effectLst>
         </p:spPr>
+        <p:txBody>
+          <a:bodyPr/>
+          <a:p/>
+        </p:txBody>
       </p:sp>
       <p:sp>
         <p:nvSpPr>
@@ -12684,6 +12864,10 @@
             </a:outerShdw>
           </a:effectLst>
         </p:spPr>
+        <p:txBody>
+          <a:bodyPr/>
+          <a:p/>
+        </p:txBody>
       </p:sp>
       <p:sp>
         <p:nvSpPr>
@@ -12998,6 +13182,10 @@
           </a:solidFill>
           <a:ln/>
         </p:spPr>
+        <p:txBody>
+          <a:bodyPr/>
+          <a:p/>
+        </p:txBody>
       </p:sp>
       <p:pic>
         <p:nvPicPr>
@@ -13098,6 +13286,10 @@
             </a:outerShdw>
           </a:effectLst>
         </p:spPr>
+        <p:txBody>
+          <a:bodyPr/>
+          <a:p/>
+        </p:txBody>
       </p:sp>
       <p:sp>
         <p:nvSpPr>
@@ -13214,6 +13406,10 @@
             </a:outerShdw>
           </a:effectLst>
         </p:spPr>
+        <p:txBody>
+          <a:bodyPr/>
+          <a:p/>
+        </p:txBody>
       </p:sp>
       <p:sp>
         <p:nvSpPr>
@@ -13509,6 +13705,10 @@
           </a:solidFill>
           <a:ln/>
         </p:spPr>
+        <p:txBody>
+          <a:bodyPr/>
+          <a:p/>
+        </p:txBody>
       </p:sp>
       <p:sp>
         <p:nvSpPr>
@@ -13619,6 +13819,10 @@
             </a:outerShdw>
           </a:effectLst>
         </p:spPr>
+        <p:txBody>
+          <a:bodyPr/>
+          <a:p/>
+        </p:txBody>
       </p:sp>
       <p:sp>
         <p:nvSpPr>
@@ -13914,6 +14118,10 @@
           </a:solidFill>
           <a:ln/>
         </p:spPr>
+        <p:txBody>
+          <a:bodyPr/>
+          <a:p/>
+        </p:txBody>
       </p:sp>
       <p:sp>
         <p:nvSpPr>
@@ -14226,6 +14434,10 @@
             </a:outerShdw>
           </a:effectLst>
         </p:spPr>
+        <p:txBody>
+          <a:bodyPr/>
+          <a:p/>
+        </p:txBody>
       </p:sp>
       <p:sp>
         <p:nvSpPr>
@@ -14589,6 +14801,10 @@
             </a:outerShdw>
           </a:effectLst>
         </p:spPr>
+        <p:txBody>
+          <a:bodyPr/>
+          <a:p/>
+        </p:txBody>
       </p:sp>
       <p:sp>
         <p:nvSpPr>
@@ -14687,7 +14903,7 @@
                 <a:ea typeface="Calibri" pitchFamily="34" charset="-122"/>
                 <a:cs typeface="Calibri" pitchFamily="34" charset="-120"/>
               </a:rPr>
-              <a:t>Relato: deslocar foco da ferramenta para a tarefa.</a:t>
+              <a:t>Deslocar foco da ferramenta para a tarefa.</a:t>
             </a:r>
             <a:endParaRPr lang="en-US" sz="1100" dirty="0"/>
           </a:p>
@@ -14708,7 +14924,7 @@
                 <a:ea typeface="Calibri" pitchFamily="34" charset="-122"/>
                 <a:cs typeface="Calibri" pitchFamily="34" charset="-120"/>
               </a:rPr>
-              <a:t>Queiroz: o resultado final não esgota a aprendizagem do conceito.</a:t>
+              <a:t>O resultado final não esgota a aprendizagem do conceito.</a:t>
             </a:r>
             <a:endParaRPr lang="en-US" sz="1100" dirty="0"/>
           </a:p>
@@ -14729,7 +14945,7 @@
                 <a:ea typeface="Calibri" pitchFamily="34" charset="-122"/>
                 <a:cs typeface="Calibri" pitchFamily="34" charset="-120"/>
               </a:rPr>
-              <a:t>Wessels: o contexto e o tipo de dado influenciam a representação escolhida.</a:t>
+              <a:t>O contexto e o tipo de dado influenciam a representação escolhida.</a:t>
             </a:r>
             <a:endParaRPr lang="en-US" sz="1100" dirty="0"/>
           </a:p>
@@ -14763,6 +14979,10 @@
             </a:outerShdw>
           </a:effectLst>
         </p:spPr>
+        <p:txBody>
+          <a:bodyPr/>
+          <a:p/>
+        </p:txBody>
       </p:sp>
       <p:sp>
         <p:nvSpPr>
@@ -14997,6 +15217,10 @@
           </a:solidFill>
           <a:ln/>
         </p:spPr>
+        <p:txBody>
+          <a:bodyPr/>
+          <a:p/>
+        </p:txBody>
       </p:sp>
       <p:sp>
         <p:nvSpPr>
@@ -15309,6 +15533,10 @@
             </a:outerShdw>
           </a:effectLst>
         </p:spPr>
+        <p:txBody>
+          <a:bodyPr/>
+          <a:p/>
+        </p:txBody>
       </p:sp>
       <p:sp>
         <p:nvSpPr>
@@ -15828,6 +16056,10 @@
             </a:outerShdw>
           </a:effectLst>
         </p:spPr>
+        <p:txBody>
+          <a:bodyPr/>
+          <a:p/>
+        </p:txBody>
       </p:sp>
       <p:sp>
         <p:nvSpPr>
@@ -15926,7 +16158,7 @@
                 <a:ea typeface="Calibri" pitchFamily="34" charset="-122"/>
                 <a:cs typeface="Calibri" pitchFamily="34" charset="-120"/>
               </a:rPr>
-              <a:t>Wessels: organizar dados é componente crítico da representação.</a:t>
+              <a:t>Organizar dados é componente crítico da representação.</a:t>
             </a:r>
             <a:endParaRPr lang="en-US" sz="1100" dirty="0"/>
           </a:p>
@@ -15947,7 +16179,7 @@
                 <a:ea typeface="Calibri" pitchFamily="34" charset="-122"/>
                 <a:cs typeface="Calibri" pitchFamily="34" charset="-120"/>
               </a:rPr>
-              <a:t>Queiroz: representações ampliam a percepção de propriedades e relações.</a:t>
+              <a:t>Representações ampliam a percepção de propriedades e relações.</a:t>
             </a:r>
             <a:endParaRPr lang="en-US" sz="1100" dirty="0"/>
           </a:p>
@@ -15968,7 +16200,7 @@
                 <a:ea typeface="Calibri" pitchFamily="34" charset="-122"/>
                 <a:cs typeface="Calibri" pitchFamily="34" charset="-120"/>
               </a:rPr>
-              <a:t>Relato: explicitar variáveis, relações e restrições.</a:t>
+              <a:t>Explicitar variáveis, relações e restrições.</a:t>
             </a:r>
             <a:endParaRPr lang="en-US" sz="1100" dirty="0"/>
           </a:p>
@@ -16002,6 +16234,10 @@
             </a:outerShdw>
           </a:effectLst>
         </p:spPr>
+        <p:txBody>
+          <a:bodyPr/>
+          <a:p/>
+        </p:txBody>
       </p:sp>
       <p:sp>
         <p:nvSpPr>
@@ -16236,6 +16472,10 @@
           </a:solidFill>
           <a:ln/>
         </p:spPr>
+        <p:txBody>
+          <a:bodyPr/>
+          <a:p/>
+        </p:txBody>
       </p:sp>
       <p:sp>
         <p:nvSpPr>
@@ -16548,6 +16788,10 @@
             </a:outerShdw>
           </a:effectLst>
         </p:spPr>
+        <p:txBody>
+          <a:bodyPr/>
+          <a:p/>
+        </p:txBody>
       </p:sp>
       <p:sp>
         <p:nvSpPr>
@@ -17257,6 +17501,10 @@
             </a:outerShdw>
           </a:effectLst>
         </p:spPr>
+        <p:txBody>
+          <a:bodyPr/>
+          <a:p/>
+        </p:txBody>
       </p:sp>
       <p:sp>
         <p:nvSpPr>
@@ -17355,7 +17603,7 @@
                 <a:ea typeface="Calibri" pitchFamily="34" charset="-122"/>
                 <a:cs typeface="Calibri" pitchFamily="34" charset="-120"/>
               </a:rPr>
-              <a:t>Relato: articular código, texto, tabela, gráfico e interpretação.</a:t>
+              <a:t>Articular código, texto, tabela, gráfico e interpretação.</a:t>
             </a:r>
             <a:endParaRPr lang="en-US" sz="1100" dirty="0"/>
           </a:p>
@@ -17376,7 +17624,7 @@
                 <a:ea typeface="Calibri" pitchFamily="34" charset="-122"/>
                 <a:cs typeface="Calibri" pitchFamily="34" charset="-120"/>
               </a:rPr>
-              <a:t>Queiroz: a tarefa deve articular dimensão material e cognitiva.</a:t>
+              <a:t>A tarefa deve articular dimensão material e cognitiva.</a:t>
             </a:r>
             <a:endParaRPr lang="en-US" sz="1100" dirty="0"/>
           </a:p>
@@ -17397,7 +17645,7 @@
                 <a:ea typeface="Calibri" pitchFamily="34" charset="-122"/>
                 <a:cs typeface="Calibri" pitchFamily="34" charset="-120"/>
               </a:rPr>
-              <a:t>Wessels: níveis SOLO ajudam a observar respostas de menor a maior integração.</a:t>
+              <a:t>Níveis SOLO ajudam a observar respostas de menor a maior integração.</a:t>
             </a:r>
             <a:endParaRPr lang="en-US" sz="1100" dirty="0"/>
           </a:p>
@@ -17431,6 +17679,10 @@
             </a:outerShdw>
           </a:effectLst>
         </p:spPr>
+        <p:txBody>
+          <a:bodyPr/>
+          <a:p/>
+        </p:txBody>
       </p:sp>
       <p:sp>
         <p:nvSpPr>
